--- a/9. Channels/Channels.pptx
+++ b/9. Channels/Channels.pptx
@@ -820,7 +820,7 @@
           <a:lstStyle/>
           <a:p>
             <a:r>
-              <a:t>Welcome to the last section of Day 2. Everything up to now has been about doing more work at the same time. Channels are about something different. They connect two pieces of code that run at different speeds, so that neither one has to know anything about the other. One side produces items, the other side consumes them, and the channel sits in the middle and absorbs the difference. You already know the two ingredients. A channel is a thread safe queue, like the concurrent collections we just covered, plus the asynchronous waiting you learned on Day 1. Put those together and you get a queue you can await. The app in this section is a device telemetry webhook that does its slow work in exactly the wrong place, and the fix touches one file. Overview of the API: https://learn.microsoft.com/dotnet/core/extensions/channels</a:t>
+              <a:t>Welcome to the last section of Day 2. Everything up to now has been about doing more work at the same time. Channels are about something different. They connect two pieces of code that run at different speeds, so that neither one has to know anything about the other. One side produces items, the other side consumes them, and the channel sits in the middle and absorbs the difference. You already know the two ingredients. A channel is a thread safe queue, like the concurrent collections we just covered, plus the asynchronous waiting you learned on Day 1. Put those together and you get a queue you can await. The app in this section is a device telemetry webhook that does its slow work in exactly the wrong place, and almost all of the fix lives in one file. Overview of the API: https://learn.microsoft.com/dotnet/core/extensions/channels</a:t>
             </a:r>
           </a:p>
         </p:txBody>
@@ -1025,23 +1025,11 @@
             </a:r>
             <a:r>
               <a:rPr dirty="0"/>
-              <a:t> that is cancelled when the app is shutting down. Forward that token all the way into </a:t>
-            </a:r>
-            <a:r>
-              <a:rPr dirty="0" err="1"/>
-              <a:t>ReadAllAsync</a:t>
+              <a:t> that is cancelled when the app is shutting down. Forwarding that token into ReadAllAsync is the obvious version, and it does unwind the loop on shutdown, but cancelling the read loop throws away every item still waiting in the channel. When every item has to be processed, override StopAsync instead: complete the writer there, then call base.StopAsync, which cancels the token and waits for ExecuteAsync to return, bounded by the host's shutdown timeout. ReadAllAsync hands out what is still buffered and then ends on its own, so the backlog is finished before the app exits.</a:t>
             </a:r>
             <a:r>
               <a:rPr dirty="0"/>
-              <a:t> and the loop unwinds on shutdown instead of holding the process open. Catch </a:t>
-            </a:r>
-            <a:r>
-              <a:rPr dirty="0" err="1"/>
-              <a:t>OperationCanceledException</a:t>
-            </a:r>
-            <a:r>
-              <a:rPr dirty="0"/>
-              <a:t> only when the token actually fired, so you never swallow a real cancellation bug. Two more things to keep in mind. A </a:t>
+              <a:t> Two more things to keep in mind. A </a:t>
             </a:r>
             <a:r>
               <a:rPr dirty="0" err="1"/>
@@ -1143,7 +1131,7 @@
           <a:lstStyle/>
           <a:p>
             <a:r>
-              <a:t>Open the Start folder, run TelemetryPipeline on port 5013, and click Receive 400 events. Watch the average accept sit above 41 milliseconds while the endpoint takes more than 16 seconds to swallow the burst. Everything you need to change is in Services/TelemetryIngestService.cs, and each mistake is marked with a ToDo Refactor comment. Your job is to make accepting an event mean queueing it, nothing more, and to let the background service do the slow write on its own time. When you are done, the accept path should measure at zero milliseconds, the burst should finish instantly, and the written count should climb to 400 over the next couple of seconds while you press Refresh counters. Read the README for the full requirement list and the acceptance checks. Twenty minutes on the clock, then we review approaches together before walking through the solution.</a:t>
+              <a:t>Open the Start folder, run TelemetryPipeline on port 5013, and click Receive 400 events. Watch the average accept sit above 41 milliseconds while the endpoint takes more than 16 seconds to swallow the burst. Almost everything you need to change is in Services/TelemetryIngestService.cs, the shutdown fix goes in Services/TelemetryProcessor.cs, and each mistake is marked with a ToDo Refactor comment that names the step that checks it. Your job is to make accepting an event mean queueing it, nothing more, and to let the background service do the slow write on its own time. When you are done, the accept path should measure at zero milliseconds, the burst should finish instantly, and the written count should climb to 400 over the next couple of seconds while you press Refresh counters. And if you press Ctrl+C straight after a burst, the app should pause for about two seconds while it writes the backlog, instead of quitting instantly. The workshop guide docked beside the Ingest page walks you through the challenge one step at a time, and the README has the full requirement list and the acceptance checks. Twenty minutes on the clock, then we review approaches together before walking through the solution.</a:t>
             </a:r>
           </a:p>
         </p:txBody>
@@ -1423,7 +1411,7 @@
           <a:lstStyle/>
           <a:p>
             <a:r>
-              <a:t>Backpressure is what a full queue does to the code filling it. Wait makes WriteAsync suspend until a consumer frees a slot, which throttles the producer to the speed of the consumer without a single line of rate limiting code. The three drop modes keep every write fast by discarding something instead. DropOldest keeps the freshest data, which is what you want for a live gauge where only the latest reading matters. DropNewest keeps the earliest data. DropWrite discards the item you are writing right now, which is the cheapest and the easiest to reason about. Under the drop modes the write reports success, so by default nothing tells you data disappeared. If you need to know, use the CreateBounded overload that takes an itemDropped callback, added in .NET 7. It runs for every item the channel discards, on the writing thread, so keep it cheap. Increment a counter, do not log inline. And note that under DropOldest and DropNewest the item you lose is one already in the queue, not the one you just wrote, which is why you cannot count drops yourself at the call site. https://learn.microsoft.com/dotnet/api/system.threading.channels.boundedchannelfullmode</a:t>
+              <a:t>Backpressure is what a full queue does to the code filling it. Wait makes WriteAsync suspend until a consumer frees a slot, which throttles the producer to the speed of the consumer without a single line of rate limiting code. The three drop modes keep every write fast by discarding something instead. DropOldest keeps the freshest data, which is what you want for a live gauge where only the latest reading matters. DropNewest keeps the earliest data. DropWrite discards the item you are writing right now, which is the cheapest and the easiest to reason about. Under the drop modes the write reports success, so by default nothing tells you data disappeared. If you need to know, use the CreateBounded overload that takes an itemDropped callback, added in .NET 6. It runs for every item the channel discards, on the writing thread, so keep it cheap. Increment a counter, do not log inline. And note that under DropOldest and DropNewest the item you lose is one already in the queue, not the one you just wrote, which is why you cannot count drops yourself at the call site. https://learn.microsoft.com/dotnet/api/system.threading.channels.boundedchannelfullmode</a:t>
             </a:r>
           </a:p>
         </p:txBody>
@@ -1563,7 +1551,7 @@
           <a:lstStyle/>
           <a:p>
             <a:r>
-              <a:t>This loop is the whole consumer. ReadAllAsync returns an IAsyncEnumerable, so an await foreach yields every item that was ever written, in order, and suspends when the channel is empty. That suspension is the reason the busy wait disappears. Waiting for the next item is now an await, not a sleep, so an idle consumer costs you nothing but a state machine sitting in memory. The loop ends on its own once the writer is completed and the buffer is drained, which is how a well behaved pipeline shuts down. Underneath, ReadAsync, TryRead, and WaitToReadAsync are still available if you need finer control, and ReadAllAsync is written in terms of them. One more property to know: Reader.Count is the current buffered depth, and it is the single best number to put on a dashboard, because it tells you which half of your pipeline is losing. https://learn.microsoft.com/dotnet/api/system.threading.channels.channelreader-1</a:t>
+              <a:t>This loop is the whole consumer. ReadAllAsync returns an IAsyncEnumerable, so an await foreach yields every item that was ever written, in order, and suspends when the channel is empty. That suspension is why a channel consumer needs no busy wait. Waiting for the next item is now an await, not a sleep, so an idle consumer costs you nothing but a state machine sitting in memory. The loop ends on its own once the writer is completed and the buffer is drained, which is how a well behaved pipeline shuts down. Underneath, ReadAsync, TryRead, and WaitToReadAsync are still available if you need finer control, and ReadAllAsync is written in terms of them. One more property to know: Reader.Count is the current buffered depth, and it is the single best number to put on a dashboard, because it tells you which half of your pipeline is losing. https://learn.microsoft.com/dotnet/api/system.threading.channels.channelreader-1</a:t>
             </a:r>
           </a:p>
         </p:txBody>
@@ -1703,7 +1691,7 @@
           <a:lstStyle/>
           <a:p>
             <a:r>
-              <a:t>You just spent a section on the concurrent collections, so this question always comes up in the room. ConcurrentQueue is storage. It is thread safe, it is fast, and TryDequeue answers immediately with whatever is there right now. What it cannot do is wait. If the queue is empty and the next item has not arrived yet, you have to write the waiting yourself, and that is exactly how people end up with the polling loop from a few slides ago. A channel is storage plus coordination. You get the same thread safe queue, and you also get an asynchronous wait for the next item, a capacity with a policy for what a full buffer does, and a completion signal that ends the consumer loop. Underneath, an unbounded channel keeps its items in a ConcurrentQueue, so this is not a performance tradeoff. Reach for a concurrent collection when you need shared storage, and for a channel when one side hands work to another. https://learn.microsoft.com/dotnet/core/extensions/channels</a:t>
+              <a:t>You just spent a section on the concurrent collections, so this question always comes up in the room. ConcurrentQueue is storage. It is thread safe, it is fast, and TryDequeue answers immediately with whatever is there right now. What it cannot do is wait. If the queue is empty and the next item has not arrived yet, you have to write the waiting yourself, and that is exactly how people end up with a polling loop that sleeps and checks again, like the one in this section's starter app. A channel is storage plus coordination. You get the same thread safe queue, and you also get an asynchronous wait for the next item, a capacity with a policy for what a full buffer does, and a completion signal that ends the consumer loop. Underneath, an unbounded channel keeps its items in a ConcurrentQueue, so this is not a performance tradeoff. Reach for a concurrent collection when you need shared storage, and for a channel when one side hands work to another. https://learn.microsoft.com/dotnet/core/extensions/channels</a:t>
             </a:r>
           </a:p>
         </p:txBody>
@@ -8026,7 +8014,7 @@
         <p:spPr>
           <a:xfrm>
             <a:off x="274320" y="1627632"/>
-            <a:ext cx="10624052" cy="1452705"/>
+            <a:ext cx="5303520" cy="5078099"/>
           </a:xfrm>
         </p:spPr>
         <p:txBody>
@@ -8041,22 +8029,14 @@
           <a:p>
             <a:r>
               <a:rPr lang="en-US" sz="2800" dirty="0"/>
-              <a:t>`stoppingToken` flows into `ReadAllAsync()`</a:t>
+              <a:t>Cancelling `ReadAllAsync()` abandons the backlog</a:t>
             </a:r>
           </a:p>
           <a:p>
             <a:pPr lvl="2"/>
             <a:r>
               <a:rPr lang="en-US" sz="2400" dirty="0"/>
-              <a:t>Catch `OperationCanceledException` when </a:t>
-            </a:r>
-            <a:r>
-              <a:rPr lang="en-US" sz="2400" dirty="0" err="1"/>
-              <a:t>CancellationToken</a:t>
-            </a:r>
-            <a:r>
-              <a:rPr lang="en-US" sz="2400" dirty="0"/>
-              <a:t> fires</a:t>
+              <a:t>Complete the writer in `StopAsync()` to drain the backlog</a:t>
             </a:r>
           </a:p>
         </p:txBody>
@@ -8071,15 +8051,15 @@
         </p:nvPicPr>
         <p:blipFill>
           <a:blip r:embed="rId3"/>
-          <a:srcRect l="6802" t="13641" r="6488" b="13799"/>
+          <a:srcRect l="6802" t="9906" r="6488" b="10021"/>
           <a:stretch>
             <a:fillRect/>
           </a:stretch>
         </p:blipFill>
         <p:spPr>
           <a:xfrm>
-            <a:off x="4596713" y="3320887"/>
-            <a:ext cx="6400800" cy="3341594"/>
+            <a:off x="5761355" y="1627632"/>
+            <a:ext cx="6400800" cy="5078099"/>
           </a:xfrm>
           <a:prstGeom prst="rect">
             <a:avLst/>
@@ -8223,7 +8203,7 @@
           <a:p>
             <a:r>
               <a:rPr lang="en-US" dirty="0"/>
-              <a:t>Delete the polling loop and its `Task.Delay`</a:t>
+              <a:t>Delete the polling loop and its `Task.Delay`, then drain the backlog on shutdown</a:t>
             </a:r>
           </a:p>
           <a:p>
